--- a/UML.pptx
+++ b/UML.pptx
@@ -18557,7 +18557,7 @@
         </p:nvGraphicFramePr>
         <p:xfrm>
           <a:off x="1063813" y="2594534"/>
-          <a:ext cx="3000000" cy="3000000"/>
+          <a:ext cx="2611725" cy="1417360"/>
         </p:xfrm>
         <a:graphic>
           <a:graphicData uri="http://schemas.openxmlformats.org/drawingml/2006/table">
@@ -18919,7 +18919,7 @@
         </p:nvGraphicFramePr>
         <p:xfrm>
           <a:off x="4790141" y="2594534"/>
-          <a:ext cx="3000000" cy="3000000"/>
+          <a:ext cx="2611725" cy="3271610"/>
         </p:xfrm>
         <a:graphic>
           <a:graphicData uri="http://schemas.openxmlformats.org/drawingml/2006/table">
@@ -19716,7 +19716,7 @@
         </p:nvGraphicFramePr>
         <p:xfrm>
           <a:off x="8516469" y="2594534"/>
-          <a:ext cx="3000000" cy="3000000"/>
+          <a:ext cx="2611725" cy="1788210"/>
         </p:xfrm>
         <a:graphic>
           <a:graphicData uri="http://schemas.openxmlformats.org/drawingml/2006/table">
@@ -20167,7 +20167,7 @@
         </p:nvGraphicFramePr>
         <p:xfrm>
           <a:off x="1063813" y="4801645"/>
-          <a:ext cx="3000000" cy="3000000"/>
+          <a:ext cx="2611725" cy="1046510"/>
         </p:xfrm>
         <a:graphic>
           <a:graphicData uri="http://schemas.openxmlformats.org/drawingml/2006/table">
@@ -21695,7 +21695,7 @@
         </p:nvGraphicFramePr>
         <p:xfrm>
           <a:off x="1063813" y="2160106"/>
-          <a:ext cx="3000000" cy="3000000"/>
+          <a:ext cx="2611725" cy="1417360"/>
         </p:xfrm>
         <a:graphic>
           <a:graphicData uri="http://schemas.openxmlformats.org/drawingml/2006/table">
@@ -22057,7 +22057,7 @@
         </p:nvGraphicFramePr>
         <p:xfrm>
           <a:off x="4757127" y="3153414"/>
-          <a:ext cx="3000000" cy="3000000"/>
+          <a:ext cx="2611725" cy="2529910"/>
         </p:xfrm>
         <a:graphic>
           <a:graphicData uri="http://schemas.openxmlformats.org/drawingml/2006/table">
@@ -22676,7 +22676,7 @@
         </p:nvGraphicFramePr>
         <p:xfrm>
           <a:off x="8758516" y="4805379"/>
-          <a:ext cx="3000000" cy="3000000"/>
+          <a:ext cx="2611725" cy="1788210"/>
         </p:xfrm>
         <a:graphic>
           <a:graphicData uri="http://schemas.openxmlformats.org/drawingml/2006/table">
@@ -23127,7 +23127,7 @@
         </p:nvGraphicFramePr>
         <p:xfrm>
           <a:off x="1063813" y="5176219"/>
-          <a:ext cx="3000000" cy="3000000"/>
+          <a:ext cx="2611725" cy="1417360"/>
         </p:xfrm>
         <a:graphic>
           <a:graphicData uri="http://schemas.openxmlformats.org/drawingml/2006/table">
@@ -23611,7 +23611,7 @@
         </p:nvGraphicFramePr>
         <p:xfrm>
           <a:off x="8758516" y="2160106"/>
-          <a:ext cx="3000000" cy="3000000"/>
+          <a:ext cx="2611725" cy="1788210"/>
         </p:xfrm>
         <a:graphic>
           <a:graphicData uri="http://schemas.openxmlformats.org/drawingml/2006/table">
@@ -24057,13 +24057,17 @@
       <p:cxnSp>
         <p:nvCxnSpPr>
           <p:cNvPr id="213" name="Google Shape;213;p25"/>
-          <p:cNvCxnSpPr/>
+          <p:cNvCxnSpPr>
+            <a:cxnSpLocks/>
+            <a:stCxn id="206" idx="2"/>
+            <a:endCxn id="207" idx="1"/>
+          </p:cNvCxnSpPr>
           <p:nvPr/>
         </p:nvCxnSpPr>
         <p:spPr>
-          <a:xfrm>
-            <a:off x="2369672" y="3577425"/>
-            <a:ext cx="2373000" cy="456900"/>
+          <a:xfrm rot="16200000" flipH="1">
+            <a:off x="3142950" y="2804191"/>
+            <a:ext cx="840903" cy="2387452"/>
           </a:xfrm>
           <a:prstGeom prst="bentConnector2">
             <a:avLst/>
@@ -24459,10 +24463,10 @@
               <a:buNone/>
             </a:pPr>
             <a:r>
-              <a:rPr lang="pt-BR"/>
+              <a:rPr lang="pt-BR" dirty="0"/>
               <a:t>O Diagrama de Sequência representa a ordem das interações entre atores e objetos ao longo do tempo para realizar uma funcionalidade do sistema, mostrando quem envia mensagens para quem e em que sequência.</a:t>
             </a:r>
-            <a:endParaRPr/>
+            <a:endParaRPr dirty="0"/>
           </a:p>
           <a:p>
             <a:pPr marL="1257300" lvl="1" indent="-342900" algn="just" rtl="0">
@@ -24480,10 +24484,10 @@
               <a:buChar char="•"/>
             </a:pPr>
             <a:r>
-              <a:rPr lang="pt-BR" sz="1800"/>
+              <a:rPr lang="pt-BR" sz="1800" dirty="0"/>
               <a:t>Mostrar o fluxo de execução de um caso de uso</a:t>
             </a:r>
-            <a:endParaRPr/>
+            <a:endParaRPr dirty="0"/>
           </a:p>
           <a:p>
             <a:pPr marL="1257300" lvl="1" indent="-342900" algn="just" rtl="0">
@@ -24501,10 +24505,10 @@
               <a:buChar char="•"/>
             </a:pPr>
             <a:r>
-              <a:rPr lang="pt-BR" sz="1800"/>
+              <a:rPr lang="pt-BR" sz="1800" dirty="0"/>
               <a:t>Visualizar a ordem das mensagens trocadas entre objetos</a:t>
             </a:r>
-            <a:endParaRPr/>
+            <a:endParaRPr dirty="0"/>
           </a:p>
           <a:p>
             <a:pPr marL="1257300" lvl="1" indent="-342900" algn="just" rtl="0">
@@ -24522,10 +24526,10 @@
               <a:buChar char="•"/>
             </a:pPr>
             <a:r>
-              <a:rPr lang="pt-BR" sz="1800"/>
+              <a:rPr lang="pt-BR" sz="1800" dirty="0"/>
               <a:t>Entender responsabilidades e dependências</a:t>
             </a:r>
-            <a:endParaRPr/>
+            <a:endParaRPr dirty="0"/>
           </a:p>
           <a:p>
             <a:pPr marL="1257300" lvl="1" indent="-342900" algn="just" rtl="0">
@@ -24543,10 +24547,10 @@
               <a:buChar char="•"/>
             </a:pPr>
             <a:r>
-              <a:rPr lang="pt-BR" sz="1800"/>
+              <a:rPr lang="pt-BR" sz="1800" dirty="0"/>
               <a:t>Ajudar a transformar requisitos em código</a:t>
             </a:r>
-            <a:endParaRPr/>
+            <a:endParaRPr dirty="0"/>
           </a:p>
         </p:txBody>
       </p:sp>
@@ -25943,30 +25947,6 @@
               <a:t>Usado para modelar processos e regras de negócio</a:t>
             </a:r>
           </a:p>
-          <a:p>
-            <a:pPr marL="0" marR="0" lvl="0" indent="0" algn="just" rtl="0">
-              <a:lnSpc>
-                <a:spcPct val="150000"/>
-              </a:lnSpc>
-              <a:spcBef>
-                <a:spcPts val="200"/>
-              </a:spcBef>
-              <a:spcAft>
-                <a:spcPts val="200"/>
-              </a:spcAft>
-              <a:buClr>
-                <a:schemeClr val="dk1"/>
-              </a:buClr>
-              <a:buSzPts val="2000"/>
-              <a:buFont typeface="Arial"/>
-              <a:buNone/>
-            </a:pPr>
-            <a:r>
-              <a:rPr lang="pt-BR" sz="1600" dirty="0"/>
-              <a:t>Responde à pergunta: “Qual é o passo a passo do processo?”</a:t>
-            </a:r>
-            <a:endParaRPr sz="1600" dirty="0"/>
-          </a:p>
         </p:txBody>
       </p:sp>
       <p:sp>
@@ -26344,20 +26324,6 @@
             <a:r>
               <a:rPr lang="pt-BR" dirty="0"/>
               <a:t>Usado para detalhar o comportamento do sistema</a:t>
-            </a:r>
-          </a:p>
-          <a:p>
-            <a:pPr marL="0" indent="0">
-              <a:spcBef>
-                <a:spcPts val="200"/>
-              </a:spcBef>
-              <a:spcAft>
-                <a:spcPts val="200"/>
-              </a:spcAft>
-            </a:pPr>
-            <a:r>
-              <a:rPr lang="pt-BR" sz="1600" dirty="0"/>
-              <a:t>Responde à pergunta: “Qual é o passo a passo do processo?”</a:t>
             </a:r>
           </a:p>
         </p:txBody>
@@ -26876,10 +26842,216 @@
       </p:cxnSp>
       <p:sp>
         <p:nvSpPr>
-          <p:cNvPr id="40" name="CaixaDeTexto 39">
+          <p:cNvPr id="4" name="Losango 3">
             <a:extLst>
               <a:ext uri="{FF2B5EF4-FFF2-40B4-BE49-F238E27FC236}">
-                <a16:creationId xmlns:a16="http://schemas.microsoft.com/office/drawing/2014/main" id="{8D585BB4-8F44-F57E-44A3-5290A13D554C}"/>
+                <a16:creationId xmlns:a16="http://schemas.microsoft.com/office/drawing/2014/main" id="{877882E7-18D9-4C83-8ADF-385C8606DECD}"/>
+              </a:ext>
+            </a:extLst>
+          </p:cNvPr>
+          <p:cNvSpPr/>
+          <p:nvPr/>
+        </p:nvSpPr>
+        <p:spPr>
+          <a:xfrm>
+            <a:off x="7237738" y="5110270"/>
+            <a:ext cx="360000" cy="360000"/>
+          </a:xfrm>
+          <a:prstGeom prst="diamond">
+            <a:avLst/>
+          </a:prstGeom>
+          <a:noFill/>
+          <a:ln w="19050">
+            <a:solidFill>
+              <a:schemeClr val="tx1"/>
+            </a:solidFill>
+          </a:ln>
+        </p:spPr>
+        <p:style>
+          <a:lnRef idx="2">
+            <a:schemeClr val="accent1">
+              <a:shade val="15000"/>
+            </a:schemeClr>
+          </a:lnRef>
+          <a:fillRef idx="1">
+            <a:schemeClr val="accent1"/>
+          </a:fillRef>
+          <a:effectRef idx="0">
+            <a:schemeClr val="accent1"/>
+          </a:effectRef>
+          <a:fontRef idx="minor">
+            <a:schemeClr val="lt1"/>
+          </a:fontRef>
+        </p:style>
+        <p:txBody>
+          <a:bodyPr rtlCol="0" anchor="ctr"/>
+          <a:lstStyle/>
+          <a:p>
+            <a:pPr algn="ctr"/>
+            <a:endParaRPr lang="pt-BR" sz="1200" dirty="0">
+              <a:solidFill>
+                <a:schemeClr val="tx1"/>
+              </a:solidFill>
+              <a:latin typeface="Times New Roman" panose="02020603050405020304" pitchFamily="18" charset="0"/>
+              <a:cs typeface="Times New Roman" panose="02020603050405020304" pitchFamily="18" charset="0"/>
+            </a:endParaRPr>
+          </a:p>
+        </p:txBody>
+      </p:sp>
+      <p:cxnSp>
+        <p:nvCxnSpPr>
+          <p:cNvPr id="7" name="Conector de Seta Reta 6">
+            <a:extLst>
+              <a:ext uri="{FF2B5EF4-FFF2-40B4-BE49-F238E27FC236}">
+                <a16:creationId xmlns:a16="http://schemas.microsoft.com/office/drawing/2014/main" id="{7CA98677-AFA8-460C-9D65-CE928A3D8778}"/>
+              </a:ext>
+            </a:extLst>
+          </p:cNvPr>
+          <p:cNvCxnSpPr>
+            <a:stCxn id="17" idx="3"/>
+            <a:endCxn id="4" idx="1"/>
+          </p:cNvCxnSpPr>
+          <p:nvPr/>
+        </p:nvCxnSpPr>
+        <p:spPr>
+          <a:xfrm flipV="1">
+            <a:off x="6652039" y="5290270"/>
+            <a:ext cx="585699" cy="1"/>
+          </a:xfrm>
+          <a:prstGeom prst="straightConnector1">
+            <a:avLst/>
+          </a:prstGeom>
+          <a:ln w="28575">
+            <a:solidFill>
+              <a:schemeClr val="tx1"/>
+            </a:solidFill>
+            <a:tailEnd type="triangle"/>
+          </a:ln>
+        </p:spPr>
+        <p:style>
+          <a:lnRef idx="1">
+            <a:schemeClr val="accent1"/>
+          </a:lnRef>
+          <a:fillRef idx="0">
+            <a:schemeClr val="accent1"/>
+          </a:fillRef>
+          <a:effectRef idx="0">
+            <a:schemeClr val="accent1"/>
+          </a:effectRef>
+          <a:fontRef idx="minor">
+            <a:schemeClr val="tx1"/>
+          </a:fontRef>
+        </p:style>
+      </p:cxnSp>
+      <p:sp>
+        <p:nvSpPr>
+          <p:cNvPr id="16" name="Retângulo: Cantos Arredondados 15">
+            <a:extLst>
+              <a:ext uri="{FF2B5EF4-FFF2-40B4-BE49-F238E27FC236}">
+                <a16:creationId xmlns:a16="http://schemas.microsoft.com/office/drawing/2014/main" id="{7C891363-D3FE-42B3-B2F5-8F7410A74C92}"/>
+              </a:ext>
+            </a:extLst>
+          </p:cNvPr>
+          <p:cNvSpPr/>
+          <p:nvPr/>
+        </p:nvSpPr>
+        <p:spPr>
+          <a:xfrm>
+            <a:off x="8183438" y="4984413"/>
+            <a:ext cx="1531398" cy="611715"/>
+          </a:xfrm>
+          <a:prstGeom prst="roundRect">
+            <a:avLst/>
+          </a:prstGeom>
+          <a:noFill/>
+          <a:ln w="19050">
+            <a:solidFill>
+              <a:schemeClr val="tx1"/>
+            </a:solidFill>
+          </a:ln>
+        </p:spPr>
+        <p:style>
+          <a:lnRef idx="2">
+            <a:schemeClr val="accent1">
+              <a:shade val="15000"/>
+            </a:schemeClr>
+          </a:lnRef>
+          <a:fillRef idx="1">
+            <a:schemeClr val="accent1"/>
+          </a:fillRef>
+          <a:effectRef idx="0">
+            <a:schemeClr val="accent1"/>
+          </a:effectRef>
+          <a:fontRef idx="minor">
+            <a:schemeClr val="lt1"/>
+          </a:fontRef>
+        </p:style>
+        <p:txBody>
+          <a:bodyPr rtlCol="0" anchor="ctr"/>
+          <a:lstStyle/>
+          <a:p>
+            <a:pPr algn="ctr"/>
+            <a:r>
+              <a:rPr lang="pt-BR" sz="1200" dirty="0">
+                <a:solidFill>
+                  <a:schemeClr val="tx1"/>
+                </a:solidFill>
+                <a:latin typeface="Times New Roman" panose="02020603050405020304" pitchFamily="18" charset="0"/>
+                <a:cs typeface="Times New Roman" panose="02020603050405020304" pitchFamily="18" charset="0"/>
+              </a:rPr>
+              <a:t>Ir para a tela alteração do pedido</a:t>
+            </a:r>
+          </a:p>
+        </p:txBody>
+      </p:sp>
+      <p:cxnSp>
+        <p:nvCxnSpPr>
+          <p:cNvPr id="25" name="Conector de Seta Reta 24">
+            <a:extLst>
+              <a:ext uri="{FF2B5EF4-FFF2-40B4-BE49-F238E27FC236}">
+                <a16:creationId xmlns:a16="http://schemas.microsoft.com/office/drawing/2014/main" id="{9EC972A8-8FE1-4826-AA14-FFADE299D701}"/>
+              </a:ext>
+            </a:extLst>
+          </p:cNvPr>
+          <p:cNvCxnSpPr/>
+          <p:nvPr/>
+        </p:nvCxnSpPr>
+        <p:spPr>
+          <a:xfrm flipV="1">
+            <a:off x="7597738" y="5290269"/>
+            <a:ext cx="585699" cy="1"/>
+          </a:xfrm>
+          <a:prstGeom prst="straightConnector1">
+            <a:avLst/>
+          </a:prstGeom>
+          <a:ln w="28575">
+            <a:solidFill>
+              <a:schemeClr val="tx1"/>
+            </a:solidFill>
+            <a:tailEnd type="triangle"/>
+          </a:ln>
+        </p:spPr>
+        <p:style>
+          <a:lnRef idx="1">
+            <a:schemeClr val="accent1"/>
+          </a:lnRef>
+          <a:fillRef idx="0">
+            <a:schemeClr val="accent1"/>
+          </a:fillRef>
+          <a:effectRef idx="0">
+            <a:schemeClr val="accent1"/>
+          </a:effectRef>
+          <a:fontRef idx="minor">
+            <a:schemeClr val="tx1"/>
+          </a:fontRef>
+        </p:style>
+      </p:cxnSp>
+      <p:sp>
+        <p:nvSpPr>
+          <p:cNvPr id="13" name="CaixaDeTexto 12">
+            <a:extLst>
+              <a:ext uri="{FF2B5EF4-FFF2-40B4-BE49-F238E27FC236}">
+                <a16:creationId xmlns:a16="http://schemas.microsoft.com/office/drawing/2014/main" id="{F54BE4C4-269B-4462-A95D-9333A6348851}"/>
               </a:ext>
             </a:extLst>
           </p:cNvPr>
@@ -26888,8 +27060,8 @@
         </p:nvSpPr>
         <p:spPr>
           <a:xfrm>
-            <a:off x="8238744" y="3878428"/>
-            <a:ext cx="2514600" cy="523220"/>
+            <a:off x="6741912" y="5658812"/>
+            <a:ext cx="1351652" cy="307777"/>
           </a:xfrm>
           <a:prstGeom prst="rect">
             <a:avLst/>
@@ -26897,20 +27069,597 @@
           <a:noFill/>
         </p:spPr>
         <p:txBody>
-          <a:bodyPr wrap="square" rtlCol="0">
+          <a:bodyPr wrap="none" rtlCol="0">
             <a:spAutoFit/>
           </a:bodyPr>
           <a:lstStyle/>
           <a:p>
-            <a:pPr algn="ctr"/>
             <a:r>
-              <a:rPr lang="pt-BR" sz="2800" dirty="0"/>
-              <a:t>...</a:t>
+              <a:rPr lang="pt-BR" dirty="0">
+                <a:latin typeface="Times New Roman" panose="02020603050405020304" pitchFamily="18" charset="0"/>
+                <a:cs typeface="Times New Roman" panose="02020603050405020304" pitchFamily="18" charset="0"/>
+              </a:rPr>
+              <a:t>Alterar pedido ?</a:t>
             </a:r>
-            <a:endParaRPr lang="pt-BR" dirty="0"/>
           </a:p>
         </p:txBody>
       </p:sp>
+      <p:sp>
+        <p:nvSpPr>
+          <p:cNvPr id="14" name="Retângulo 13">
+            <a:extLst>
+              <a:ext uri="{FF2B5EF4-FFF2-40B4-BE49-F238E27FC236}">
+                <a16:creationId xmlns:a16="http://schemas.microsoft.com/office/drawing/2014/main" id="{3B44D7D7-A5A1-42C7-AAF0-4C7F9A8370C0}"/>
+              </a:ext>
+            </a:extLst>
+          </p:cNvPr>
+          <p:cNvSpPr/>
+          <p:nvPr/>
+        </p:nvSpPr>
+        <p:spPr>
+          <a:xfrm rot="5400000">
+            <a:off x="8368041" y="3406616"/>
+            <a:ext cx="1162191" cy="263388"/>
+          </a:xfrm>
+          <a:prstGeom prst="rect">
+            <a:avLst/>
+          </a:prstGeom>
+          <a:noFill/>
+          <a:ln w="19050">
+            <a:solidFill>
+              <a:schemeClr val="tx1"/>
+            </a:solidFill>
+          </a:ln>
+        </p:spPr>
+        <p:style>
+          <a:lnRef idx="2">
+            <a:schemeClr val="accent1">
+              <a:shade val="15000"/>
+            </a:schemeClr>
+          </a:lnRef>
+          <a:fillRef idx="1">
+            <a:schemeClr val="accent1"/>
+          </a:fillRef>
+          <a:effectRef idx="0">
+            <a:schemeClr val="accent1"/>
+          </a:effectRef>
+          <a:fontRef idx="minor">
+            <a:schemeClr val="lt1"/>
+          </a:fontRef>
+        </p:style>
+        <p:txBody>
+          <a:bodyPr rtlCol="0" anchor="ctr"/>
+          <a:lstStyle/>
+          <a:p>
+            <a:pPr algn="ctr"/>
+            <a:endParaRPr lang="pt-BR" sz="1200">
+              <a:solidFill>
+                <a:schemeClr val="tx1"/>
+              </a:solidFill>
+              <a:latin typeface="Times New Roman" panose="02020603050405020304" pitchFamily="18" charset="0"/>
+              <a:cs typeface="Times New Roman" panose="02020603050405020304" pitchFamily="18" charset="0"/>
+            </a:endParaRPr>
+          </a:p>
+        </p:txBody>
+      </p:sp>
+      <p:cxnSp>
+        <p:nvCxnSpPr>
+          <p:cNvPr id="26" name="Conector de Seta Reta 25">
+            <a:extLst>
+              <a:ext uri="{FF2B5EF4-FFF2-40B4-BE49-F238E27FC236}">
+                <a16:creationId xmlns:a16="http://schemas.microsoft.com/office/drawing/2014/main" id="{91DC152B-7A67-4898-AF91-853AC899259E}"/>
+              </a:ext>
+            </a:extLst>
+          </p:cNvPr>
+          <p:cNvCxnSpPr>
+            <a:cxnSpLocks/>
+            <a:stCxn id="4" idx="0"/>
+            <a:endCxn id="14" idx="2"/>
+          </p:cNvCxnSpPr>
+          <p:nvPr/>
+        </p:nvCxnSpPr>
+        <p:spPr>
+          <a:xfrm flipV="1">
+            <a:off x="7417738" y="3538311"/>
+            <a:ext cx="1399705" cy="1571959"/>
+          </a:xfrm>
+          <a:prstGeom prst="straightConnector1">
+            <a:avLst/>
+          </a:prstGeom>
+          <a:ln w="28575">
+            <a:solidFill>
+              <a:schemeClr val="tx1"/>
+            </a:solidFill>
+            <a:tailEnd type="triangle"/>
+          </a:ln>
+        </p:spPr>
+        <p:style>
+          <a:lnRef idx="1">
+            <a:schemeClr val="accent1"/>
+          </a:lnRef>
+          <a:fillRef idx="0">
+            <a:schemeClr val="accent1"/>
+          </a:fillRef>
+          <a:effectRef idx="0">
+            <a:schemeClr val="accent1"/>
+          </a:effectRef>
+          <a:fontRef idx="minor">
+            <a:schemeClr val="tx1"/>
+          </a:fontRef>
+        </p:style>
+      </p:cxnSp>
+      <p:sp>
+        <p:nvSpPr>
+          <p:cNvPr id="31" name="Retângulo: Cantos Arredondados 30">
+            <a:extLst>
+              <a:ext uri="{FF2B5EF4-FFF2-40B4-BE49-F238E27FC236}">
+                <a16:creationId xmlns:a16="http://schemas.microsoft.com/office/drawing/2014/main" id="{307D6A43-3310-42A8-A3D0-3C5F09F0AAB6}"/>
+              </a:ext>
+            </a:extLst>
+          </p:cNvPr>
+          <p:cNvSpPr/>
+          <p:nvPr/>
+        </p:nvSpPr>
+        <p:spPr>
+          <a:xfrm>
+            <a:off x="9868803" y="2594916"/>
+            <a:ext cx="1531398" cy="611715"/>
+          </a:xfrm>
+          <a:prstGeom prst="roundRect">
+            <a:avLst/>
+          </a:prstGeom>
+          <a:noFill/>
+          <a:ln w="19050">
+            <a:solidFill>
+              <a:schemeClr val="tx1"/>
+            </a:solidFill>
+          </a:ln>
+        </p:spPr>
+        <p:style>
+          <a:lnRef idx="2">
+            <a:schemeClr val="accent1">
+              <a:shade val="15000"/>
+            </a:schemeClr>
+          </a:lnRef>
+          <a:fillRef idx="1">
+            <a:schemeClr val="accent1"/>
+          </a:fillRef>
+          <a:effectRef idx="0">
+            <a:schemeClr val="accent1"/>
+          </a:effectRef>
+          <a:fontRef idx="minor">
+            <a:schemeClr val="lt1"/>
+          </a:fontRef>
+        </p:style>
+        <p:txBody>
+          <a:bodyPr rtlCol="0" anchor="ctr"/>
+          <a:lstStyle/>
+          <a:p>
+            <a:pPr algn="ctr"/>
+            <a:r>
+              <a:rPr lang="pt-BR" sz="1200" dirty="0">
+                <a:solidFill>
+                  <a:schemeClr val="tx1"/>
+                </a:solidFill>
+                <a:latin typeface="Times New Roman" panose="02020603050405020304" pitchFamily="18" charset="0"/>
+                <a:cs typeface="Times New Roman" panose="02020603050405020304" pitchFamily="18" charset="0"/>
+              </a:rPr>
+              <a:t>Avaliar atendimento</a:t>
+            </a:r>
+          </a:p>
+        </p:txBody>
+      </p:sp>
+      <p:sp>
+        <p:nvSpPr>
+          <p:cNvPr id="32" name="Retângulo: Cantos Arredondados 31">
+            <a:extLst>
+              <a:ext uri="{FF2B5EF4-FFF2-40B4-BE49-F238E27FC236}">
+                <a16:creationId xmlns:a16="http://schemas.microsoft.com/office/drawing/2014/main" id="{9A819F3A-2DCF-4FD4-8547-312C4DA0FAAE}"/>
+              </a:ext>
+            </a:extLst>
+          </p:cNvPr>
+          <p:cNvSpPr/>
+          <p:nvPr/>
+        </p:nvSpPr>
+        <p:spPr>
+          <a:xfrm>
+            <a:off x="9868803" y="3869988"/>
+            <a:ext cx="1531398" cy="611715"/>
+          </a:xfrm>
+          <a:prstGeom prst="roundRect">
+            <a:avLst/>
+          </a:prstGeom>
+          <a:noFill/>
+          <a:ln w="19050">
+            <a:solidFill>
+              <a:schemeClr val="tx1"/>
+            </a:solidFill>
+          </a:ln>
+        </p:spPr>
+        <p:style>
+          <a:lnRef idx="2">
+            <a:schemeClr val="accent1">
+              <a:shade val="15000"/>
+            </a:schemeClr>
+          </a:lnRef>
+          <a:fillRef idx="1">
+            <a:schemeClr val="accent1"/>
+          </a:fillRef>
+          <a:effectRef idx="0">
+            <a:schemeClr val="accent1"/>
+          </a:effectRef>
+          <a:fontRef idx="minor">
+            <a:schemeClr val="lt1"/>
+          </a:fontRef>
+        </p:style>
+        <p:txBody>
+          <a:bodyPr rtlCol="0" anchor="ctr"/>
+          <a:lstStyle/>
+          <a:p>
+            <a:pPr algn="ctr"/>
+            <a:r>
+              <a:rPr lang="pt-BR" sz="1200" dirty="0">
+                <a:solidFill>
+                  <a:schemeClr val="tx1"/>
+                </a:solidFill>
+                <a:latin typeface="Times New Roman" panose="02020603050405020304" pitchFamily="18" charset="0"/>
+                <a:cs typeface="Times New Roman" panose="02020603050405020304" pitchFamily="18" charset="0"/>
+              </a:rPr>
+              <a:t>Avaliar o local</a:t>
+            </a:r>
+          </a:p>
+        </p:txBody>
+      </p:sp>
+      <p:cxnSp>
+        <p:nvCxnSpPr>
+          <p:cNvPr id="30" name="Conector de Seta Reta 29">
+            <a:extLst>
+              <a:ext uri="{FF2B5EF4-FFF2-40B4-BE49-F238E27FC236}">
+                <a16:creationId xmlns:a16="http://schemas.microsoft.com/office/drawing/2014/main" id="{80279357-B5B2-43BD-BDA0-8BC5C8A560CB}"/>
+              </a:ext>
+            </a:extLst>
+          </p:cNvPr>
+          <p:cNvCxnSpPr>
+            <a:stCxn id="14" idx="0"/>
+            <a:endCxn id="31" idx="1"/>
+          </p:cNvCxnSpPr>
+          <p:nvPr/>
+        </p:nvCxnSpPr>
+        <p:spPr>
+          <a:xfrm flipV="1">
+            <a:off x="9080831" y="2900774"/>
+            <a:ext cx="787972" cy="637537"/>
+          </a:xfrm>
+          <a:prstGeom prst="straightConnector1">
+            <a:avLst/>
+          </a:prstGeom>
+          <a:ln w="28575">
+            <a:solidFill>
+              <a:schemeClr val="tx1"/>
+            </a:solidFill>
+            <a:tailEnd type="triangle"/>
+          </a:ln>
+        </p:spPr>
+        <p:style>
+          <a:lnRef idx="1">
+            <a:schemeClr val="accent1"/>
+          </a:lnRef>
+          <a:fillRef idx="0">
+            <a:schemeClr val="accent1"/>
+          </a:fillRef>
+          <a:effectRef idx="0">
+            <a:schemeClr val="accent1"/>
+          </a:effectRef>
+          <a:fontRef idx="minor">
+            <a:schemeClr val="tx1"/>
+          </a:fontRef>
+        </p:style>
+      </p:cxnSp>
+      <p:cxnSp>
+        <p:nvCxnSpPr>
+          <p:cNvPr id="35" name="Conector de Seta Reta 34">
+            <a:extLst>
+              <a:ext uri="{FF2B5EF4-FFF2-40B4-BE49-F238E27FC236}">
+                <a16:creationId xmlns:a16="http://schemas.microsoft.com/office/drawing/2014/main" id="{0FD3D387-0697-434F-8E4B-0B52A54BBFE8}"/>
+              </a:ext>
+            </a:extLst>
+          </p:cNvPr>
+          <p:cNvCxnSpPr>
+            <a:stCxn id="14" idx="0"/>
+            <a:endCxn id="32" idx="1"/>
+          </p:cNvCxnSpPr>
+          <p:nvPr/>
+        </p:nvCxnSpPr>
+        <p:spPr>
+          <a:xfrm>
+            <a:off x="9080831" y="3538311"/>
+            <a:ext cx="787972" cy="637535"/>
+          </a:xfrm>
+          <a:prstGeom prst="straightConnector1">
+            <a:avLst/>
+          </a:prstGeom>
+          <a:ln w="28575">
+            <a:solidFill>
+              <a:schemeClr val="tx1"/>
+            </a:solidFill>
+            <a:tailEnd type="triangle"/>
+          </a:ln>
+        </p:spPr>
+        <p:style>
+          <a:lnRef idx="1">
+            <a:schemeClr val="accent1"/>
+          </a:lnRef>
+          <a:fillRef idx="0">
+            <a:schemeClr val="accent1"/>
+          </a:fillRef>
+          <a:effectRef idx="0">
+            <a:schemeClr val="accent1"/>
+          </a:effectRef>
+          <a:fontRef idx="minor">
+            <a:schemeClr val="tx1"/>
+          </a:fontRef>
+        </p:style>
+      </p:cxnSp>
+      <p:grpSp>
+        <p:nvGrpSpPr>
+          <p:cNvPr id="41" name="Agrupar 40">
+            <a:extLst>
+              <a:ext uri="{FF2B5EF4-FFF2-40B4-BE49-F238E27FC236}">
+                <a16:creationId xmlns:a16="http://schemas.microsoft.com/office/drawing/2014/main" id="{D3C6FAFA-5453-43E2-83CB-92D5A97A65DB}"/>
+              </a:ext>
+            </a:extLst>
+          </p:cNvPr>
+          <p:cNvGrpSpPr/>
+          <p:nvPr/>
+        </p:nvGrpSpPr>
+        <p:grpSpPr>
+          <a:xfrm>
+            <a:off x="11532818" y="5298812"/>
+            <a:ext cx="540000" cy="720000"/>
+            <a:chOff x="8081616" y="4417570"/>
+            <a:chExt cx="720000" cy="1440000"/>
+          </a:xfrm>
+        </p:grpSpPr>
+        <p:sp>
+          <p:nvSpPr>
+            <p:cNvPr id="42" name="Elipse 41">
+              <a:extLst>
+                <a:ext uri="{FF2B5EF4-FFF2-40B4-BE49-F238E27FC236}">
+                  <a16:creationId xmlns:a16="http://schemas.microsoft.com/office/drawing/2014/main" id="{CCC7A36E-7BC2-419A-8BDA-72C7D2DA1B90}"/>
+                </a:ext>
+              </a:extLst>
+            </p:cNvPr>
+            <p:cNvSpPr/>
+            <p:nvPr/>
+          </p:nvSpPr>
+          <p:spPr>
+            <a:xfrm>
+              <a:off x="8261616" y="4777570"/>
+              <a:ext cx="360000" cy="720000"/>
+            </a:xfrm>
+            <a:prstGeom prst="ellipse">
+              <a:avLst/>
+            </a:prstGeom>
+            <a:noFill/>
+            <a:ln>
+              <a:solidFill>
+                <a:schemeClr val="tx1"/>
+              </a:solidFill>
+            </a:ln>
+          </p:spPr>
+          <p:style>
+            <a:lnRef idx="2">
+              <a:schemeClr val="accent1">
+                <a:shade val="15000"/>
+              </a:schemeClr>
+            </a:lnRef>
+            <a:fillRef idx="1">
+              <a:schemeClr val="accent1"/>
+            </a:fillRef>
+            <a:effectRef idx="0">
+              <a:schemeClr val="accent1"/>
+            </a:effectRef>
+            <a:fontRef idx="minor">
+              <a:schemeClr val="lt1"/>
+            </a:fontRef>
+          </p:style>
+          <p:txBody>
+            <a:bodyPr rtlCol="0" anchor="ctr"/>
+            <a:lstStyle/>
+            <a:p>
+              <a:pPr algn="ctr"/>
+              <a:endParaRPr lang="pt-BR"/>
+            </a:p>
+          </p:txBody>
+        </p:sp>
+        <p:sp>
+          <p:nvSpPr>
+            <p:cNvPr id="43" name="Elipse 42">
+              <a:extLst>
+                <a:ext uri="{FF2B5EF4-FFF2-40B4-BE49-F238E27FC236}">
+                  <a16:creationId xmlns:a16="http://schemas.microsoft.com/office/drawing/2014/main" id="{3DCBC75B-E711-4024-A069-C56E81E37907}"/>
+                </a:ext>
+              </a:extLst>
+            </p:cNvPr>
+            <p:cNvSpPr/>
+            <p:nvPr/>
+          </p:nvSpPr>
+          <p:spPr>
+            <a:xfrm>
+              <a:off x="8081616" y="4417570"/>
+              <a:ext cx="720000" cy="1440000"/>
+            </a:xfrm>
+            <a:prstGeom prst="ellipse">
+              <a:avLst/>
+            </a:prstGeom>
+            <a:noFill/>
+            <a:ln>
+              <a:solidFill>
+                <a:schemeClr val="tx1"/>
+              </a:solidFill>
+            </a:ln>
+          </p:spPr>
+          <p:style>
+            <a:lnRef idx="2">
+              <a:schemeClr val="accent1">
+                <a:shade val="15000"/>
+              </a:schemeClr>
+            </a:lnRef>
+            <a:fillRef idx="1">
+              <a:schemeClr val="accent1"/>
+            </a:fillRef>
+            <a:effectRef idx="0">
+              <a:schemeClr val="accent1"/>
+            </a:effectRef>
+            <a:fontRef idx="minor">
+              <a:schemeClr val="lt1"/>
+            </a:fontRef>
+          </p:style>
+          <p:txBody>
+            <a:bodyPr rtlCol="0" anchor="ctr"/>
+            <a:lstStyle/>
+            <a:p>
+              <a:pPr algn="ctr"/>
+              <a:endParaRPr lang="pt-BR"/>
+            </a:p>
+          </p:txBody>
+        </p:sp>
+      </p:grpSp>
+      <p:cxnSp>
+        <p:nvCxnSpPr>
+          <p:cNvPr id="37" name="Conector: Angulado 36">
+            <a:extLst>
+              <a:ext uri="{FF2B5EF4-FFF2-40B4-BE49-F238E27FC236}">
+                <a16:creationId xmlns:a16="http://schemas.microsoft.com/office/drawing/2014/main" id="{1762D7ED-4BF8-4E45-8699-DA165E5A11B4}"/>
+              </a:ext>
+            </a:extLst>
+          </p:cNvPr>
+          <p:cNvCxnSpPr>
+            <a:cxnSpLocks/>
+            <a:stCxn id="31" idx="3"/>
+            <a:endCxn id="43" idx="0"/>
+          </p:cNvCxnSpPr>
+          <p:nvPr/>
+        </p:nvCxnSpPr>
+        <p:spPr>
+          <a:xfrm>
+            <a:off x="11400201" y="2900774"/>
+            <a:ext cx="402617" cy="2398038"/>
+          </a:xfrm>
+          <a:prstGeom prst="bentConnector2">
+            <a:avLst/>
+          </a:prstGeom>
+          <a:ln w="28575">
+            <a:solidFill>
+              <a:schemeClr val="tx1"/>
+            </a:solidFill>
+            <a:tailEnd type="triangle"/>
+          </a:ln>
+        </p:spPr>
+        <p:style>
+          <a:lnRef idx="1">
+            <a:schemeClr val="accent1"/>
+          </a:lnRef>
+          <a:fillRef idx="0">
+            <a:schemeClr val="accent1"/>
+          </a:fillRef>
+          <a:effectRef idx="0">
+            <a:schemeClr val="accent1"/>
+          </a:effectRef>
+          <a:fontRef idx="minor">
+            <a:schemeClr val="tx1"/>
+          </a:fontRef>
+        </p:style>
+      </p:cxnSp>
+      <p:cxnSp>
+        <p:nvCxnSpPr>
+          <p:cNvPr id="45" name="Conector reto 44">
+            <a:extLst>
+              <a:ext uri="{FF2B5EF4-FFF2-40B4-BE49-F238E27FC236}">
+                <a16:creationId xmlns:a16="http://schemas.microsoft.com/office/drawing/2014/main" id="{95450CAB-974C-4F67-9CED-6518DE006B81}"/>
+              </a:ext>
+            </a:extLst>
+          </p:cNvPr>
+          <p:cNvCxnSpPr>
+            <a:stCxn id="32" idx="3"/>
+          </p:cNvCxnSpPr>
+          <p:nvPr/>
+        </p:nvCxnSpPr>
+        <p:spPr>
+          <a:xfrm>
+            <a:off x="11400201" y="4175846"/>
+            <a:ext cx="402617" cy="8439"/>
+          </a:xfrm>
+          <a:prstGeom prst="line">
+            <a:avLst/>
+          </a:prstGeom>
+          <a:ln w="28575">
+            <a:solidFill>
+              <a:schemeClr val="tx1"/>
+            </a:solidFill>
+            <a:tailEnd type="triangle"/>
+          </a:ln>
+        </p:spPr>
+        <p:style>
+          <a:lnRef idx="1">
+            <a:schemeClr val="accent1"/>
+          </a:lnRef>
+          <a:fillRef idx="0">
+            <a:schemeClr val="accent1"/>
+          </a:fillRef>
+          <a:effectRef idx="0">
+            <a:schemeClr val="accent1"/>
+          </a:effectRef>
+          <a:fontRef idx="minor">
+            <a:schemeClr val="tx1"/>
+          </a:fontRef>
+        </p:style>
+      </p:cxnSp>
+      <p:cxnSp>
+        <p:nvCxnSpPr>
+          <p:cNvPr id="47" name="Conector de Seta Reta 46">
+            <a:extLst>
+              <a:ext uri="{FF2B5EF4-FFF2-40B4-BE49-F238E27FC236}">
+                <a16:creationId xmlns:a16="http://schemas.microsoft.com/office/drawing/2014/main" id="{F4B8B510-81C8-42C7-BBBD-AA195551006B}"/>
+              </a:ext>
+            </a:extLst>
+          </p:cNvPr>
+          <p:cNvCxnSpPr>
+            <a:stCxn id="16" idx="0"/>
+            <a:endCxn id="14" idx="3"/>
+          </p:cNvCxnSpPr>
+          <p:nvPr/>
+        </p:nvCxnSpPr>
+        <p:spPr>
+          <a:xfrm flipV="1">
+            <a:off x="8949137" y="4119406"/>
+            <a:ext cx="0" cy="865007"/>
+          </a:xfrm>
+          <a:prstGeom prst="straightConnector1">
+            <a:avLst/>
+          </a:prstGeom>
+          <a:ln w="28575">
+            <a:solidFill>
+              <a:schemeClr val="tx1"/>
+            </a:solidFill>
+            <a:tailEnd type="triangle"/>
+          </a:ln>
+        </p:spPr>
+        <p:style>
+          <a:lnRef idx="1">
+            <a:schemeClr val="accent1"/>
+          </a:lnRef>
+          <a:fillRef idx="0">
+            <a:schemeClr val="accent1"/>
+          </a:fillRef>
+          <a:effectRef idx="0">
+            <a:schemeClr val="accent1"/>
+          </a:effectRef>
+          <a:fontRef idx="minor">
+            <a:schemeClr val="tx1"/>
+          </a:fontRef>
+        </p:style>
+      </p:cxnSp>
     </p:spTree>
     <p:extLst>
       <p:ext uri="{BB962C8B-B14F-4D97-AF65-F5344CB8AC3E}">
